--- a/apps/resources/bundled_files/1-klass-koshuu-bingo-v4.pptx
+++ b/apps/resources/bundled_files/1-klass-koshuu-bingo-v4.pptx
@@ -5264,7 +5264,7 @@
                 </a:solidFill>
                 <a:latin typeface="PT Sans"/>
               </a:rPr>
-              <a:t>1-класс › 10 ичинде кошуу</a:t>
+              <a:t>10 ичинде кошуу</a:t>
             </a:r>
           </a:p>
           <a:p>
@@ -6209,7 +6209,7 @@
                 </a:solidFill>
                 <a:latin typeface="PT Sans"/>
               </a:rPr>
-              <a:t>1-класс › 10 ичинде кошуу</a:t>
+              <a:t>10 ичинде кошуу</a:t>
             </a:r>
           </a:p>
           <a:p>
@@ -7636,7 +7636,7 @@
                 </a:solidFill>
                 <a:latin typeface="PT Sans"/>
               </a:rPr>
-              <a:t>1-класс › 10 ичинде кошуу</a:t>
+              <a:t>10 ичинде кошуу</a:t>
             </a:r>
           </a:p>
           <a:p>
@@ -8741,7 +8741,7 @@
                 </a:solidFill>
                 <a:latin typeface="PT Sans"/>
               </a:rPr>
-              <a:t>1-класс › 10 ичинде кошуу</a:t>
+              <a:t>10 ичинде кошуу</a:t>
             </a:r>
           </a:p>
           <a:p>
@@ -9892,7 +9892,7 @@
                 </a:solidFill>
                 <a:latin typeface="PT Sans"/>
               </a:rPr>
-              <a:t>1-класс › 10 ичинде кошуу</a:t>
+              <a:t>10 ичинде кошуу</a:t>
             </a:r>
           </a:p>
           <a:p>
@@ -11365,7 +11365,7 @@
                 </a:solidFill>
                 <a:latin typeface="PT Sans"/>
               </a:rPr>
-              <a:t>1-класс › 10 ичинде кошуу</a:t>
+              <a:t>10 ичинде кошуу</a:t>
             </a:r>
           </a:p>
           <a:p>
@@ -12930,7 +12930,7 @@
                 </a:solidFill>
                 <a:latin typeface="PT Sans"/>
               </a:rPr>
-              <a:t>1-класс › 10 ичинде кошуу</a:t>
+              <a:t>10 ичинде кошуу</a:t>
             </a:r>
           </a:p>
           <a:p>
@@ -14311,7 +14311,7 @@
                 </a:solidFill>
                 <a:latin typeface="PT Sans"/>
               </a:rPr>
-              <a:t>1-класс › 10 ичинде кошуу</a:t>
+              <a:t>10 ичинде кошуу</a:t>
             </a:r>
           </a:p>
           <a:p>
@@ -15830,7 +15830,7 @@
                 </a:solidFill>
                 <a:latin typeface="PT Sans"/>
               </a:rPr>
-              <a:t>1-класс › 10 ичинде кошуу</a:t>
+              <a:t>10 ичинде кошуу</a:t>
             </a:r>
           </a:p>
           <a:p>
@@ -17119,7 +17119,7 @@
                 </a:solidFill>
                 <a:latin typeface="PT Sans"/>
               </a:rPr>
-              <a:t>1-класс › 10 ичинде кошуу</a:t>
+              <a:t>10 ичинде кошуу</a:t>
             </a:r>
           </a:p>
           <a:p>
@@ -18454,7 +18454,7 @@
                 </a:solidFill>
                 <a:latin typeface="PT Sans"/>
               </a:rPr>
-              <a:t>1-класс › 10 ичинде кошуу</a:t>
+              <a:t>10 ичинде кошуу</a:t>
             </a:r>
           </a:p>
           <a:p>
@@ -19743,7 +19743,7 @@
                 </a:solidFill>
                 <a:latin typeface="PT Sans"/>
               </a:rPr>
-              <a:t>1-класс › 10 ичинде кошуу</a:t>
+              <a:t>10 ичинде кошуу</a:t>
             </a:r>
           </a:p>
           <a:p>
@@ -21071,7 +21071,7 @@
                 </a:solidFill>
                 <a:latin typeface="PT Sans"/>
               </a:rPr>
-              <a:t>1-класс › 10 ичинде кошуу</a:t>
+              <a:t>10 ичинде кошуу</a:t>
             </a:r>
           </a:p>
           <a:p>
@@ -22498,7 +22498,7 @@
                 </a:solidFill>
                 <a:latin typeface="PT Sans"/>
               </a:rPr>
-              <a:t>1-класс › 10 ичинде кошуу</a:t>
+              <a:t>10 ичинде кошуу</a:t>
             </a:r>
           </a:p>
           <a:p>
@@ -25238,7 +25238,7 @@
                 </a:solidFill>
                 <a:latin typeface="PT Sans"/>
               </a:rPr>
-              <a:t>1-класс › 10 ичинде кошуу</a:t>
+              <a:t>10 ичинде кошуу</a:t>
             </a:r>
           </a:p>
           <a:p>
@@ -29820,7 +29820,7 @@
                 </a:solidFill>
                 <a:latin typeface="PT Sans"/>
               </a:rPr>
-              <a:t>1-класс › 10 ичинде кошуу</a:t>
+              <a:t>10 ичинде кошуу</a:t>
             </a:r>
           </a:p>
           <a:p>
@@ -31293,7 +31293,7 @@
                 </a:solidFill>
                 <a:latin typeface="PT Sans"/>
               </a:rPr>
-              <a:t>1-класс › 10 ичинде кошуу</a:t>
+              <a:t>10 ичинде кошуу</a:t>
             </a:r>
           </a:p>
           <a:p>
@@ -32536,7 +32536,7 @@
                 </a:solidFill>
                 <a:latin typeface="PT Sans"/>
               </a:rPr>
-              <a:t>1-класс › 10 ичинде кошуу</a:t>
+              <a:t>10 ичинде кошуу</a:t>
             </a:r>
           </a:p>
           <a:p>
@@ -33917,7 +33917,7 @@
                 </a:solidFill>
                 <a:latin typeface="PT Sans"/>
               </a:rPr>
-              <a:t>1-класс › 10 ичинде кошуу</a:t>
+              <a:t>10 ичинде кошуу</a:t>
             </a:r>
           </a:p>
           <a:p>
@@ -35252,7 +35252,7 @@
                 </a:solidFill>
                 <a:latin typeface="PT Sans"/>
               </a:rPr>
-              <a:t>1-класс › 10 ичинде кошуу</a:t>
+              <a:t>10 ичинде кошуу</a:t>
             </a:r>
           </a:p>
           <a:p>
@@ -36771,7 +36771,7 @@
                 </a:solidFill>
                 <a:latin typeface="PT Sans"/>
               </a:rPr>
-              <a:t>1-класс › 10 ичинде кошуу</a:t>
+              <a:t>10 ичинде кошуу</a:t>
             </a:r>
           </a:p>
           <a:p>
@@ -38336,7 +38336,7 @@
                 </a:solidFill>
                 <a:latin typeface="PT Sans"/>
               </a:rPr>
-              <a:t>1-класс › 10 ичинде кошуу</a:t>
+              <a:t>10 ичинде кошуу</a:t>
             </a:r>
           </a:p>
           <a:p>
